--- a/slides/FA24-BEDS-042.pptx
+++ b/slides/FA24-BEDS-042.pptx
@@ -4,16 +4,16 @@
   <p:sldMasterIdLst>
     <p:sldMasterId id="2147483648" r:id="rId1"/>
   </p:sldMasterIdLst>
+  <p:notesMasterIdLst>
+    <p:notesMasterId r:id="rId6"/>
+  </p:notesMasterIdLst>
   <p:sldIdLst>
     <p:sldId id="256" r:id="rId2"/>
     <p:sldId id="257" r:id="rId3"/>
     <p:sldId id="258" r:id="rId4"/>
     <p:sldId id="259" r:id="rId5"/>
   </p:sldIdLst>
-  <p:notesMasterIdLst>
-    <p:notesMasterId r:id="rId6"/>
-  </p:notesMasterIdLst>
-  <p:sldSz cx="9144000" cy="5143500"/>
+  <p:sldSz cx="9144000" cy="5143500" type="screen16x9"/>
   <p:notesSz cx="5143500" cy="9144000"/>
   <p:defaultTextStyle>
     <a:lvl1pPr marL="0" algn="l" defTabSz="914400" rtl="0" eaLnBrk="1" latinLnBrk="0" hangingPunct="1">
@@ -107,6 +107,11 @@
       </a:defRPr>
     </a:lvl9pPr>
   </p:defaultTextStyle>
+  <p:extLst>
+    <p:ext uri="{EFAFB233-063F-42B5-8137-9DF3F51BA10A}">
+      <p15:sldGuideLst xmlns:p15="http://schemas.microsoft.com/office/powerpoint/2012/main"/>
+    </p:ext>
+  </p:extLst>
 </p:presentation>
 </file>
 
@@ -132,234 +137,10 @@
           <a:chExt cx="0" cy="0"/>
         </a:xfrm>
       </p:grpSpPr>
-      <p:sp>
-        <p:nvSpPr>
-          <p:cNvPr id="2" name="Header Placeholder 1"/>
-          <p:cNvSpPr>
-            <a:spLocks noGrp="1"/>
-          </p:cNvSpPr>
-          <p:nvPr>
-            <p:ph type="hdr" sz="quarter"/>
-          </p:nvPr>
-        </p:nvSpPr>
-        <p:spPr>
-          <a:xfrm>
-            <a:off x="0" y="0"/>
-            <a:ext cx="2971800" cy="458788"/>
-          </a:xfrm>
-          <a:prstGeom prst="rect">
-            <a:avLst/>
-          </a:prstGeom>
-        </p:spPr>
-        <p:txBody>
-          <a:bodyPr vert="horz" lIns="91440" tIns="45720" rIns="91440" bIns="45720" rtlCol="0"/>
-          <a:lstStyle>
-            <a:lvl1pPr algn="l">
-              <a:defRPr sz="1200"/>
-            </a:lvl1pPr>
-          </a:lstStyle>
-          <a:p>
-            <a:endParaRPr lang="en-US"/>
-          </a:p>
-        </p:txBody>
-      </p:sp>
-      <p:sp>
-        <p:nvSpPr>
-          <p:cNvPr id="3" name="Date Placeholder 2"/>
-          <p:cNvSpPr>
-            <a:spLocks noGrp="1"/>
-          </p:cNvSpPr>
-          <p:nvPr>
-            <p:ph type="dt" idx="1"/>
-          </p:nvPr>
-        </p:nvSpPr>
-        <p:spPr>
-          <a:xfrm>
-            <a:off x="3884613" y="0"/>
-            <a:ext cx="2971800" cy="458788"/>
-          </a:xfrm>
-          <a:prstGeom prst="rect">
-            <a:avLst/>
-          </a:prstGeom>
-        </p:spPr>
-        <p:txBody>
-          <a:bodyPr vert="horz" lIns="91440" tIns="45720" rIns="91440" bIns="45720" rtlCol="0"/>
-          <a:lstStyle>
-            <a:lvl1pPr algn="r">
-              <a:defRPr sz="1200"/>
-            </a:lvl1pPr>
-          </a:lstStyle>
-          <a:p>
-            <a:fld id="{5282F153-3F37-0F45-9E97-73ACFA13230C}" type="datetimeFigureOut">
-              <a:rPr lang="en-US"/>
-              <a:t>7/23/19</a:t>
-            </a:fld>
-            <a:endParaRPr lang="en-US"/>
-          </a:p>
-        </p:txBody>
-      </p:sp>
-      <p:sp>
-        <p:nvSpPr>
-          <p:cNvPr id="4" name="Slide Image Placeholder 3"/>
-          <p:cNvSpPr>
-            <a:spLocks noGrp="1" noRot="1" noChangeAspect="1"/>
-          </p:cNvSpPr>
-          <p:nvPr>
-            <p:ph type="sldImg" idx="2"/>
-          </p:nvPr>
-        </p:nvSpPr>
-        <p:spPr>
-          <a:xfrm>
-            <a:off x="685800" y="1143000"/>
-            <a:ext cx="5486400" cy="3086100"/>
-          </a:xfrm>
-          <a:prstGeom prst="rect">
-            <a:avLst/>
-          </a:prstGeom>
-          <a:noFill/>
-          <a:ln w="12700">
-            <a:solidFill>
-              <a:prstClr val="black"/>
-            </a:solidFill>
-          </a:ln>
-        </p:spPr>
-        <p:txBody>
-          <a:bodyPr vert="horz" lIns="91440" tIns="45720" rIns="91440" bIns="45720" rtlCol="0" anchor="ctr"/>
-          <a:lstStyle/>
-          <a:p>
-            <a:endParaRPr lang="en-US"/>
-          </a:p>
-        </p:txBody>
-      </p:sp>
-      <p:sp>
-        <p:nvSpPr>
-          <p:cNvPr id="5" name="Notes Placeholder 4"/>
-          <p:cNvSpPr>
-            <a:spLocks noGrp="1"/>
-          </p:cNvSpPr>
-          <p:nvPr>
-            <p:ph type="body" sz="quarter" idx="3"/>
-          </p:nvPr>
-        </p:nvSpPr>
-        <p:spPr>
-          <a:xfrm>
-            <a:off x="685800" y="4400550"/>
-            <a:ext cx="5486400" cy="3600450"/>
-          </a:xfrm>
-          <a:prstGeom prst="rect">
-            <a:avLst/>
-          </a:prstGeom>
-        </p:spPr>
-        <p:txBody>
-          <a:bodyPr vert="horz" lIns="91440" tIns="45720" rIns="91440" bIns="45720" rtlCol="0"/>
-          <a:lstStyle/>
-          <a:p>
-            <a:pPr lvl="0"/>
-            <a:r>
-              <a:rPr lang="en-US"/>
-              <a:t>Click to edit Master text styles</a:t>
-            </a:r>
-          </a:p>
-          <a:p>
-            <a:pPr lvl="1"/>
-            <a:r>
-              <a:rPr lang="en-US"/>
-              <a:t>Second level</a:t>
-            </a:r>
-          </a:p>
-          <a:p>
-            <a:pPr lvl="2"/>
-            <a:r>
-              <a:rPr lang="en-US"/>
-              <a:t>Third level</a:t>
-            </a:r>
-          </a:p>
-          <a:p>
-            <a:pPr lvl="3"/>
-            <a:r>
-              <a:rPr lang="en-US"/>
-              <a:t>Fourth level</a:t>
-            </a:r>
-          </a:p>
-          <a:p>
-            <a:pPr lvl="4"/>
-            <a:r>
-              <a:rPr lang="en-US"/>
-              <a:t>Fifth level</a:t>
-            </a:r>
-          </a:p>
-        </p:txBody>
-      </p:sp>
-      <p:sp>
-        <p:nvSpPr>
-          <p:cNvPr id="6" name="Footer Placeholder 5"/>
-          <p:cNvSpPr>
-            <a:spLocks noGrp="1"/>
-          </p:cNvSpPr>
-          <p:nvPr>
-            <p:ph type="ftr" sz="quarter" idx="4"/>
-          </p:nvPr>
-        </p:nvSpPr>
-        <p:spPr>
-          <a:xfrm>
-            <a:off x="0" y="8685213"/>
-            <a:ext cx="2971800" cy="458787"/>
-          </a:xfrm>
-          <a:prstGeom prst="rect">
-            <a:avLst/>
-          </a:prstGeom>
-        </p:spPr>
-        <p:txBody>
-          <a:bodyPr vert="horz" lIns="91440" tIns="45720" rIns="91440" bIns="45720" rtlCol="0" anchor="b"/>
-          <a:lstStyle>
-            <a:lvl1pPr algn="l">
-              <a:defRPr sz="1200"/>
-            </a:lvl1pPr>
-          </a:lstStyle>
-          <a:p>
-            <a:endParaRPr lang="en-US"/>
-          </a:p>
-        </p:txBody>
-      </p:sp>
-      <p:sp>
-        <p:nvSpPr>
-          <p:cNvPr id="7" name="Slide Number Placeholder 6"/>
-          <p:cNvSpPr>
-            <a:spLocks noGrp="1"/>
-          </p:cNvSpPr>
-          <p:nvPr>
-            <p:ph type="sldNum" sz="quarter" idx="5"/>
-          </p:nvPr>
-        </p:nvSpPr>
-        <p:spPr>
-          <a:xfrm>
-            <a:off x="3884613" y="8685213"/>
-            <a:ext cx="2971800" cy="458787"/>
-          </a:xfrm>
-          <a:prstGeom prst="rect">
-            <a:avLst/>
-          </a:prstGeom>
-        </p:spPr>
-        <p:txBody>
-          <a:bodyPr vert="horz" lIns="91440" tIns="45720" rIns="91440" bIns="45720" rtlCol="0" anchor="b"/>
-          <a:lstStyle>
-            <a:lvl1pPr algn="r">
-              <a:defRPr sz="1200"/>
-            </a:lvl1pPr>
-          </a:lstStyle>
-          <a:p>
-            <a:fld id="{CE5E9CC1-C706-0F49-92D6-E571CC5EEA8F}" type="slidenum">
-              <a:rPr lang="en-US"/>
-              <a:t>‹#›</a:t>
-            </a:fld>
-            <a:endParaRPr lang="en-US"/>
-          </a:p>
-        </p:txBody>
-      </p:sp>
     </p:spTree>
     <p:extLst>
       <p:ext uri="{BB962C8B-B14F-4D97-AF65-F5344CB8AC3E}">
-        <p14:creationId xmlns:p14="http://schemas.microsoft.com/office/powerpoint/2010/main" val="1024086991"/>
+        <p14:creationId xmlns:p14="http://schemas.microsoft.com/office/powerpoint/2010/main" val="1190058555"/>
       </p:ext>
     </p:extLst>
   </p:cSld>
@@ -507,7 +288,6 @@
               <a:rPr lang="en-US" dirty="0"/>
               <a:t>Q2: 1,440 students; weighted median Rs 4,500, unweighted Rs 4,295; weighted P10 Rs 1,000, P90 Rs 15,500, ratio 15.50; 1 student excluded outside Rs 100 to Rs 1,000,000. Sample: rural Sindh persons with ed_total above zero.</a:t>
             </a:r>
-            <a:endParaRPr lang="en-US" dirty="0"/>
           </a:p>
         </p:txBody>
       </p:sp>
@@ -595,7 +375,6 @@
               <a:rPr lang="en-US" dirty="0"/>
               <a:t>Q4: three changes tied to Chapters 1-4: conditional means and overplotting, Cleveland-McGill, direct labels and data-ink, weights. Default shows individual observations and within-band spread; redesign hides them.</a:t>
             </a:r>
-            <a:endParaRPr lang="en-US" dirty="0"/>
           </a:p>
         </p:txBody>
       </p:sp>
@@ -683,7 +462,6 @@
               <a:rPr lang="en-US" dirty="0"/>
               <a:t>Women 15-19: 28.0%, men 59.5%, gap 31.5. Women 55-59: 9.6%, men 40.0%, gap 30.4. Largest gap 42.5 at 30-34.</a:t>
             </a:r>
-            <a:endParaRPr lang="en-US" dirty="0"/>
           </a:p>
         </p:txBody>
       </p:sp>
@@ -771,7 +549,6 @@
               <a:rPr lang="en-US" dirty="0"/>
               <a:t>Script: scripts/04_second_language.py. It recomputes the band table and compares it with the R table.</a:t>
             </a:r>
-            <a:endParaRPr lang="en-US" dirty="0"/>
           </a:p>
         </p:txBody>
       </p:sp>
@@ -844,6 +621,11 @@
 <file path=ppt/slideMasters/slideMaster1.xml><?xml version="1.0" encoding="utf-8"?>
 <p:sldMaster xmlns:a="http://schemas.openxmlformats.org/drawingml/2006/main" xmlns:r="http://schemas.openxmlformats.org/officeDocument/2006/relationships" xmlns:p="http://schemas.openxmlformats.org/presentationml/2006/main">
   <p:cSld>
+    <p:bg>
+      <p:bgRef idx="1001">
+        <a:schemeClr val="bg1"/>
+      </p:bgRef>
+    </p:bg>
     <p:spTree>
       <p:nvGrpSpPr>
         <p:cNvPr id="1" name=""/>
@@ -1126,6 +908,7 @@
         <a:solidFill>
           <a:srgbClr val="F5F3EF"/>
         </a:solidFill>
+        <a:effectLst/>
       </p:bgPr>
     </p:bg>
     <p:spTree>
@@ -1188,7 +971,7 @@
           <a:bodyPr wrap="square" lIns="0" tIns="0" rIns="0" bIns="0" rtlCol="0" anchor="t"/>
           <a:lstStyle/>
           <a:p>
-            <a:pPr indent="0" marL="0">
+            <a:pPr marL="0" indent="0">
               <a:buNone/>
             </a:pPr>
             <a:r>
@@ -1227,7 +1010,7 @@
           <a:bodyPr wrap="square" lIns="0" tIns="0" rIns="0" bIns="0" rtlCol="0" anchor="t"/>
           <a:lstStyle/>
           <a:p>
-            <a:pPr algn="r" indent="0" marL="0">
+            <a:pPr marL="0" indent="0" algn="r">
               <a:buNone/>
             </a:pPr>
             <a:r>
@@ -1266,7 +1049,7 @@
           <a:bodyPr wrap="square" lIns="0" tIns="0" rIns="0" bIns="0" rtlCol="0" anchor="ctr"/>
           <a:lstStyle/>
           <a:p>
-            <a:pPr indent="0" marL="0">
+            <a:pPr marL="0" indent="0">
               <a:buNone/>
             </a:pPr>
             <a:r>
@@ -1284,36 +1067,6 @@
           </a:p>
         </p:txBody>
       </p:sp>
-      <p:pic>
-        <p:nvPicPr>
-          <p:cNvPr id="6" name="Image 0" descr="Weighted histogram of annual education spending, rural Sindh">    </p:cNvPr>
-          <p:cNvPicPr>
-            <a:picLocks noChangeAspect="1"/>
-          </p:cNvPicPr>
-          <p:nvPr/>
-        </p:nvPicPr>
-        <p:blipFill>
-          <a:blip r:embed="rId1">
-            <a:extLst>
-              <a:ext uri="{96DAC541-7B7A-43D3-8B79-37D633B846F1}">
-                <asvg:svgBlip xmlns:asvg="http://schemas.microsoft.com/office/drawing/2016/SVG/main" r:embed="rId2"/>
-              </a:ext>
-            </a:extLst>
-          </a:blip>
-          <a:stretch>
-            <a:fillRect/>
-          </a:stretch>
-        </p:blipFill>
-        <p:spPr>
-          <a:xfrm>
-            <a:off x="365760" y="1188720"/>
-            <a:ext cx="4572000" cy="2946400"/>
-          </a:xfrm>
-          <a:prstGeom prst="rect">
-            <a:avLst/>
-          </a:prstGeom>
-        </p:spPr>
-      </p:pic>
       <p:sp>
         <p:nvSpPr>
           <p:cNvPr id="7" name="Text 4"/>
@@ -1335,7 +1088,7 @@
           <a:bodyPr wrap="square" lIns="0" tIns="0" rIns="0" bIns="0" rtlCol="0" anchor="t"/>
           <a:lstStyle/>
           <a:p>
-            <a:pPr indent="0" marL="0">
+            <a:pPr marL="0" indent="0">
               <a:spcAft>
                 <a:spcPts val="300"/>
               </a:spcAft>
@@ -1355,7 +1108,7 @@
             <a:endParaRPr lang="en-US" sz="1150" dirty="0"/>
           </a:p>
           <a:p>
-            <a:pPr indent="0" marL="0">
+            <a:pPr marL="0" indent="0">
               <a:spcAft>
                 <a:spcPts val="300"/>
               </a:spcAft>
@@ -1378,7 +1131,7 @@
       </p:sp>
       <p:graphicFrame>
         <p:nvGraphicFramePr>
-          <p:cNvPr id="2" name="Table 0"/>
+          <p:cNvPr id="8" name="Table 0"/>
           <p:cNvGraphicFramePr>
             <a:graphicFrameLocks noGrp="1"/>
           </p:cNvGraphicFramePr>
@@ -1392,15 +1145,27 @@
         </p:nvGraphicFramePr>
         <p:xfrm>
           <a:off x="5349240" y="2240280"/>
-          <a:ext cx="3383280" cy="914400"/>
+          <a:ext cx="3383280" cy="1920240"/>
         </p:xfrm>
         <a:graphic>
           <a:graphicData uri="http://schemas.openxmlformats.org/drawingml/2006/table">
             <a:tbl>
               <a:tblPr/>
               <a:tblGrid>
-                <a:gridCol w="2194560"/>
-                <a:gridCol w="1188720"/>
+                <a:gridCol w="2194560">
+                  <a:extLst>
+                    <a:ext uri="{9D8B030D-6E8A-4147-A177-3AD203B41FA5}">
+                      <a16:colId xmlns:a16="http://schemas.microsoft.com/office/drawing/2014/main" val="20000"/>
+                    </a:ext>
+                  </a:extLst>
+                </a:gridCol>
+                <a:gridCol w="1188720">
+                  <a:extLst>
+                    <a:ext uri="{9D8B030D-6E8A-4147-A177-3AD203B41FA5}">
+                      <a16:colId xmlns:a16="http://schemas.microsoft.com/office/drawing/2014/main" val="20001"/>
+                    </a:ext>
+                  </a:extLst>
+                </a:gridCol>
               </a:tblGrid>
               <a:tr h="274320">
                 <a:tc>
@@ -1408,7 +1173,7 @@
                     <a:bodyPr/>
                     <a:lstStyle/>
                     <a:p>
-                      <a:pPr indent="0" marL="0">
+                      <a:pPr marL="0" indent="0">
                         <a:buNone/>
                       </a:pPr>
                       <a:r>
@@ -1429,7 +1194,7 @@
                       </a:endParaRPr>
                     </a:p>
                   </a:txBody>
-                  <a:tcPr marL="91440" marR="91440" marT="45720" marB="45720">
+                  <a:tcPr>
                     <a:lnL w="6350" cap="flat" cmpd="sng" algn="ctr">
                       <a:solidFill>
                         <a:srgbClr val="DDDDDD"/>
@@ -1476,7 +1241,7 @@
                     <a:bodyPr/>
                     <a:lstStyle/>
                     <a:p>
-                      <a:pPr algn="r" indent="0" marL="0">
+                      <a:pPr marL="0" indent="0" algn="r">
                         <a:buNone/>
                       </a:pPr>
                       <a:r>
@@ -1497,7 +1262,7 @@
                       </a:endParaRPr>
                     </a:p>
                   </a:txBody>
-                  <a:tcPr marL="91440" marR="91440" marT="45720" marB="45720">
+                  <a:tcPr>
                     <a:lnL w="6350" cap="flat" cmpd="sng" algn="ctr">
                       <a:solidFill>
                         <a:srgbClr val="DDDDDD"/>
@@ -1539,6 +1304,11 @@
                     </a:solidFill>
                   </a:tcPr>
                 </a:tc>
+                <a:extLst>
+                  <a:ext uri="{0D108BD9-81ED-4DB2-BD59-A6C34878D82A}">
+                    <a16:rowId xmlns:a16="http://schemas.microsoft.com/office/drawing/2014/main" val="10000"/>
+                  </a:ext>
+                </a:extLst>
               </a:tr>
               <a:tr h="274320">
                 <a:tc>
@@ -1546,7 +1316,7 @@
                     <a:bodyPr/>
                     <a:lstStyle/>
                     <a:p>
-                      <a:pPr indent="0" marL="0">
+                      <a:pPr marL="0" indent="0">
                         <a:buNone/>
                       </a:pPr>
                       <a:r>
@@ -1567,7 +1337,7 @@
                       </a:endParaRPr>
                     </a:p>
                   </a:txBody>
-                  <a:tcPr marL="91440" marR="91440" marT="45720" marB="45720">
+                  <a:tcPr>
                     <a:lnL w="6350" cap="flat" cmpd="sng" algn="ctr">
                       <a:solidFill>
                         <a:srgbClr val="DDDDDD"/>
@@ -1614,7 +1384,7 @@
                     <a:bodyPr/>
                     <a:lstStyle/>
                     <a:p>
-                      <a:pPr algn="r" indent="0" marL="0">
+                      <a:pPr marL="0" indent="0" algn="r">
                         <a:buNone/>
                       </a:pPr>
                       <a:r>
@@ -1635,7 +1405,7 @@
                       </a:endParaRPr>
                     </a:p>
                   </a:txBody>
-                  <a:tcPr marL="91440" marR="91440" marT="45720" marB="45720">
+                  <a:tcPr>
                     <a:lnL w="6350" cap="flat" cmpd="sng" algn="ctr">
                       <a:solidFill>
                         <a:srgbClr val="DDDDDD"/>
@@ -1677,6 +1447,11 @@
                     </a:solidFill>
                   </a:tcPr>
                 </a:tc>
+                <a:extLst>
+                  <a:ext uri="{0D108BD9-81ED-4DB2-BD59-A6C34878D82A}">
+                    <a16:rowId xmlns:a16="http://schemas.microsoft.com/office/drawing/2014/main" val="10001"/>
+                  </a:ext>
+                </a:extLst>
               </a:tr>
               <a:tr h="274320">
                 <a:tc>
@@ -1684,7 +1459,7 @@
                     <a:bodyPr/>
                     <a:lstStyle/>
                     <a:p>
-                      <a:pPr indent="0" marL="0">
+                      <a:pPr marL="0" indent="0">
                         <a:buNone/>
                       </a:pPr>
                       <a:r>
@@ -1705,7 +1480,7 @@
                       </a:endParaRPr>
                     </a:p>
                   </a:txBody>
-                  <a:tcPr marL="91440" marR="91440" marT="45720" marB="45720">
+                  <a:tcPr>
                     <a:lnL w="6350" cap="flat" cmpd="sng" algn="ctr">
                       <a:solidFill>
                         <a:srgbClr val="DDDDDD"/>
@@ -1752,7 +1527,7 @@
                     <a:bodyPr/>
                     <a:lstStyle/>
                     <a:p>
-                      <a:pPr algn="r" indent="0" marL="0">
+                      <a:pPr marL="0" indent="0" algn="r">
                         <a:buNone/>
                       </a:pPr>
                       <a:r>
@@ -1773,7 +1548,7 @@
                       </a:endParaRPr>
                     </a:p>
                   </a:txBody>
-                  <a:tcPr marL="91440" marR="91440" marT="45720" marB="45720">
+                  <a:tcPr>
                     <a:lnL w="6350" cap="flat" cmpd="sng" algn="ctr">
                       <a:solidFill>
                         <a:srgbClr val="DDDDDD"/>
@@ -1815,6 +1590,11 @@
                     </a:solidFill>
                   </a:tcPr>
                 </a:tc>
+                <a:extLst>
+                  <a:ext uri="{0D108BD9-81ED-4DB2-BD59-A6C34878D82A}">
+                    <a16:rowId xmlns:a16="http://schemas.microsoft.com/office/drawing/2014/main" val="10002"/>
+                  </a:ext>
+                </a:extLst>
               </a:tr>
               <a:tr h="274320">
                 <a:tc>
@@ -1822,7 +1602,7 @@
                     <a:bodyPr/>
                     <a:lstStyle/>
                     <a:p>
-                      <a:pPr indent="0" marL="0">
+                      <a:pPr marL="0" indent="0">
                         <a:buNone/>
                       </a:pPr>
                       <a:r>
@@ -1843,7 +1623,7 @@
                       </a:endParaRPr>
                     </a:p>
                   </a:txBody>
-                  <a:tcPr marL="91440" marR="91440" marT="45720" marB="45720">
+                  <a:tcPr>
                     <a:lnL w="6350" cap="flat" cmpd="sng" algn="ctr">
                       <a:solidFill>
                         <a:srgbClr val="DDDDDD"/>
@@ -1890,7 +1670,7 @@
                     <a:bodyPr/>
                     <a:lstStyle/>
                     <a:p>
-                      <a:pPr algn="r" indent="0" marL="0">
+                      <a:pPr marL="0" indent="0" algn="r">
                         <a:buNone/>
                       </a:pPr>
                       <a:r>
@@ -1911,7 +1691,7 @@
                       </a:endParaRPr>
                     </a:p>
                   </a:txBody>
-                  <a:tcPr marL="91440" marR="91440" marT="45720" marB="45720">
+                  <a:tcPr>
                     <a:lnL w="6350" cap="flat" cmpd="sng" algn="ctr">
                       <a:solidFill>
                         <a:srgbClr val="DDDDDD"/>
@@ -1953,6 +1733,11 @@
                     </a:solidFill>
                   </a:tcPr>
                 </a:tc>
+                <a:extLst>
+                  <a:ext uri="{0D108BD9-81ED-4DB2-BD59-A6C34878D82A}">
+                    <a16:rowId xmlns:a16="http://schemas.microsoft.com/office/drawing/2014/main" val="10003"/>
+                  </a:ext>
+                </a:extLst>
               </a:tr>
               <a:tr h="274320">
                 <a:tc>
@@ -1960,7 +1745,7 @@
                     <a:bodyPr/>
                     <a:lstStyle/>
                     <a:p>
-                      <a:pPr indent="0" marL="0">
+                      <a:pPr marL="0" indent="0">
                         <a:buNone/>
                       </a:pPr>
                       <a:r>
@@ -1981,7 +1766,7 @@
                       </a:endParaRPr>
                     </a:p>
                   </a:txBody>
-                  <a:tcPr marL="91440" marR="91440" marT="45720" marB="45720">
+                  <a:tcPr>
                     <a:lnL w="6350" cap="flat" cmpd="sng" algn="ctr">
                       <a:solidFill>
                         <a:srgbClr val="DDDDDD"/>
@@ -2028,7 +1813,7 @@
                     <a:bodyPr/>
                     <a:lstStyle/>
                     <a:p>
-                      <a:pPr algn="r" indent="0" marL="0">
+                      <a:pPr marL="0" indent="0" algn="r">
                         <a:buNone/>
                       </a:pPr>
                       <a:r>
@@ -2049,7 +1834,7 @@
                       </a:endParaRPr>
                     </a:p>
                   </a:txBody>
-                  <a:tcPr marL="91440" marR="91440" marT="45720" marB="45720">
+                  <a:tcPr>
                     <a:lnL w="6350" cap="flat" cmpd="sng" algn="ctr">
                       <a:solidFill>
                         <a:srgbClr val="DDDDDD"/>
@@ -2091,6 +1876,11 @@
                     </a:solidFill>
                   </a:tcPr>
                 </a:tc>
+                <a:extLst>
+                  <a:ext uri="{0D108BD9-81ED-4DB2-BD59-A6C34878D82A}">
+                    <a16:rowId xmlns:a16="http://schemas.microsoft.com/office/drawing/2014/main" val="10004"/>
+                  </a:ext>
+                </a:extLst>
               </a:tr>
               <a:tr h="274320">
                 <a:tc>
@@ -2098,7 +1888,7 @@
                     <a:bodyPr/>
                     <a:lstStyle/>
                     <a:p>
-                      <a:pPr indent="0" marL="0">
+                      <a:pPr marL="0" indent="0">
                         <a:buNone/>
                       </a:pPr>
                       <a:r>
@@ -2119,7 +1909,7 @@
                       </a:endParaRPr>
                     </a:p>
                   </a:txBody>
-                  <a:tcPr marL="91440" marR="91440" marT="45720" marB="45720">
+                  <a:tcPr>
                     <a:lnL w="6350" cap="flat" cmpd="sng" algn="ctr">
                       <a:solidFill>
                         <a:srgbClr val="DDDDDD"/>
@@ -2166,7 +1956,7 @@
                     <a:bodyPr/>
                     <a:lstStyle/>
                     <a:p>
-                      <a:pPr algn="r" indent="0" marL="0">
+                      <a:pPr marL="0" indent="0" algn="r">
                         <a:buNone/>
                       </a:pPr>
                       <a:r>
@@ -2187,7 +1977,7 @@
                       </a:endParaRPr>
                     </a:p>
                   </a:txBody>
-                  <a:tcPr marL="91440" marR="91440" marT="45720" marB="45720">
+                  <a:tcPr>
                     <a:lnL w="6350" cap="flat" cmpd="sng" algn="ctr">
                       <a:solidFill>
                         <a:srgbClr val="DDDDDD"/>
@@ -2229,6 +2019,11 @@
                     </a:solidFill>
                   </a:tcPr>
                 </a:tc>
+                <a:extLst>
+                  <a:ext uri="{0D108BD9-81ED-4DB2-BD59-A6C34878D82A}">
+                    <a16:rowId xmlns:a16="http://schemas.microsoft.com/office/drawing/2014/main" val="10005"/>
+                  </a:ext>
+                </a:extLst>
               </a:tr>
               <a:tr h="274320">
                 <a:tc>
@@ -2236,7 +2031,7 @@
                     <a:bodyPr/>
                     <a:lstStyle/>
                     <a:p>
-                      <a:pPr indent="0" marL="0">
+                      <a:pPr marL="0" indent="0">
                         <a:buNone/>
                       </a:pPr>
                       <a:r>
@@ -2257,7 +2052,7 @@
                       </a:endParaRPr>
                     </a:p>
                   </a:txBody>
-                  <a:tcPr marL="91440" marR="91440" marT="45720" marB="45720">
+                  <a:tcPr>
                     <a:lnL w="6350" cap="flat" cmpd="sng" algn="ctr">
                       <a:solidFill>
                         <a:srgbClr val="DDDDDD"/>
@@ -2304,7 +2099,7 @@
                     <a:bodyPr/>
                     <a:lstStyle/>
                     <a:p>
-                      <a:pPr algn="r" indent="0" marL="0">
+                      <a:pPr marL="0" indent="0" algn="r">
                         <a:buNone/>
                       </a:pPr>
                       <a:r>
@@ -2325,7 +2120,7 @@
                       </a:endParaRPr>
                     </a:p>
                   </a:txBody>
-                  <a:tcPr marL="91440" marR="91440" marT="45720" marB="45720">
+                  <a:tcPr>
                     <a:lnL w="6350" cap="flat" cmpd="sng" algn="ctr">
                       <a:solidFill>
                         <a:srgbClr val="DDDDDD"/>
@@ -2367,6 +2162,11 @@
                     </a:solidFill>
                   </a:tcPr>
                 </a:tc>
+                <a:extLst>
+                  <a:ext uri="{0D108BD9-81ED-4DB2-BD59-A6C34878D82A}">
+                    <a16:rowId xmlns:a16="http://schemas.microsoft.com/office/drawing/2014/main" val="10006"/>
+                  </a:ext>
+                </a:extLst>
               </a:tr>
             </a:tbl>
           </a:graphicData>
@@ -2393,7 +2193,7 @@
           <a:bodyPr wrap="square" lIns="0" tIns="0" rIns="0" bIns="0" rtlCol="0" anchor="t"/>
           <a:lstStyle/>
           <a:p>
-            <a:pPr indent="0" marL="0">
+            <a:pPr marL="0" indent="0">
               <a:buNone/>
             </a:pPr>
             <a:r>
@@ -2411,6 +2211,30 @@
           </a:p>
         </p:txBody>
       </p:sp>
+      <p:pic>
+        <p:nvPicPr>
+          <p:cNvPr id="11" name="Picture 10"/>
+          <p:cNvPicPr>
+            <a:picLocks noChangeAspect="1"/>
+          </p:cNvPicPr>
+          <p:nvPr/>
+        </p:nvPicPr>
+        <p:blipFill>
+          <a:blip r:embed="rId3"/>
+          <a:stretch>
+            <a:fillRect/>
+          </a:stretch>
+        </p:blipFill>
+        <p:spPr>
+          <a:xfrm>
+            <a:off x="365760" y="1188720"/>
+            <a:ext cx="4815840" cy="2751236"/>
+          </a:xfrm>
+          <a:prstGeom prst="rect">
+            <a:avLst/>
+          </a:prstGeom>
+        </p:spPr>
+      </p:pic>
     </p:spTree>
   </p:cSld>
   <p:clrMapOvr>
@@ -2427,6 +2251,7 @@
         <a:solidFill>
           <a:srgbClr val="F5F3EF"/>
         </a:solidFill>
+        <a:effectLst/>
       </p:bgPr>
     </p:bg>
     <p:spTree>
@@ -2489,7 +2314,7 @@
           <a:bodyPr wrap="square" lIns="0" tIns="0" rIns="0" bIns="0" rtlCol="0" anchor="t"/>
           <a:lstStyle/>
           <a:p>
-            <a:pPr indent="0" marL="0">
+            <a:pPr marL="0" indent="0">
               <a:buNone/>
             </a:pPr>
             <a:r>
@@ -2528,7 +2353,7 @@
           <a:bodyPr wrap="square" lIns="0" tIns="0" rIns="0" bIns="0" rtlCol="0" anchor="t"/>
           <a:lstStyle/>
           <a:p>
-            <a:pPr algn="r" indent="0" marL="0">
+            <a:pPr marL="0" indent="0" algn="r">
               <a:buNone/>
             </a:pPr>
             <a:r>
@@ -2567,7 +2392,7 @@
           <a:bodyPr wrap="square" lIns="0" tIns="0" rIns="0" bIns="0" rtlCol="0" anchor="ctr"/>
           <a:lstStyle/>
           <a:p>
-            <a:pPr indent="0" marL="0">
+            <a:pPr marL="0" indent="0">
               <a:buNone/>
             </a:pPr>
             <a:r>
@@ -2606,7 +2431,7 @@
           <a:bodyPr wrap="square" lIns="0" tIns="0" rIns="0" bIns="0" rtlCol="0" anchor="t"/>
           <a:lstStyle/>
           <a:p>
-            <a:pPr indent="0" marL="0">
+            <a:pPr marL="0" indent="0">
               <a:buNone/>
             </a:pPr>
             <a:r>
@@ -2645,7 +2470,7 @@
           <a:bodyPr wrap="square" lIns="0" tIns="0" rIns="0" bIns="0" rtlCol="0" anchor="t"/>
           <a:lstStyle/>
           <a:p>
-            <a:pPr indent="0" marL="0">
+            <a:pPr marL="0" indent="0">
               <a:buNone/>
             </a:pPr>
             <a:r>
@@ -2663,66 +2488,6 @@
           </a:p>
         </p:txBody>
       </p:sp>
-      <p:pic>
-        <p:nvPicPr>
-          <p:cNvPr id="8" name="Image 0" descr="Default scatterplot of literate against age">    </p:cNvPr>
-          <p:cNvPicPr>
-            <a:picLocks noChangeAspect="1"/>
-          </p:cNvPicPr>
-          <p:nvPr/>
-        </p:nvPicPr>
-        <p:blipFill>
-          <a:blip r:embed="rId1">
-            <a:extLst>
-              <a:ext uri="{96DAC541-7B7A-43D3-8B79-37D633B846F1}">
-                <asvg:svgBlip xmlns:asvg="http://schemas.microsoft.com/office/drawing/2016/SVG/main" r:embed="rId2"/>
-              </a:ext>
-            </a:extLst>
-          </a:blip>
-          <a:stretch>
-            <a:fillRect/>
-          </a:stretch>
-        </p:blipFill>
-        <p:spPr>
-          <a:xfrm>
-            <a:off x="457200" y="1371600"/>
-            <a:ext cx="2377440" cy="2377440"/>
-          </a:xfrm>
-          <a:prstGeom prst="rect">
-            <a:avLst/>
-          </a:prstGeom>
-        </p:spPr>
-      </p:pic>
-      <p:pic>
-        <p:nvPicPr>
-          <p:cNvPr id="9" name="Image 1" descr="Redesigned weighted literacy rate by age band, women and men">    </p:cNvPr>
-          <p:cNvPicPr>
-            <a:picLocks noChangeAspect="1"/>
-          </p:cNvPicPr>
-          <p:nvPr/>
-        </p:nvPicPr>
-        <p:blipFill>
-          <a:blip r:embed="rId3">
-            <a:extLst>
-              <a:ext uri="{96DAC541-7B7A-43D3-8B79-37D633B846F1}">
-                <asvg:svgBlip xmlns:asvg="http://schemas.microsoft.com/office/drawing/2016/SVG/main" r:embed="rId4"/>
-              </a:ext>
-            </a:extLst>
-          </a:blip>
-          <a:stretch>
-            <a:fillRect/>
-          </a:stretch>
-        </p:blipFill>
-        <p:spPr>
-          <a:xfrm>
-            <a:off x="3291840" y="1371600"/>
-            <a:ext cx="3685032" cy="2377440"/>
-          </a:xfrm>
-          <a:prstGeom prst="rect">
-            <a:avLst/>
-          </a:prstGeom>
-        </p:spPr>
-      </p:pic>
       <p:sp>
         <p:nvSpPr>
           <p:cNvPr id="10" name="Shape 6"/>
@@ -2769,7 +2534,7 @@
           <a:bodyPr wrap="square" lIns="0" tIns="0" rIns="0" bIns="0" rtlCol="0" anchor="t"/>
           <a:lstStyle/>
           <a:p>
-            <a:pPr indent="0" marL="0">
+            <a:pPr marL="0" indent="0">
               <a:spcAft>
                 <a:spcPts val="500"/>
               </a:spcAft>
@@ -2789,7 +2554,7 @@
             <a:endParaRPr lang="en-US" sz="1150" dirty="0"/>
           </a:p>
           <a:p>
-            <a:pPr indent="0" marL="0">
+            <a:pPr marL="0" indent="0">
               <a:spcAft>
                 <a:spcPts val="500"/>
               </a:spcAft>
@@ -2831,7 +2596,7 @@
           <a:bodyPr wrap="square" lIns="0" tIns="0" rIns="0" bIns="0" rtlCol="0" anchor="t"/>
           <a:lstStyle/>
           <a:p>
-            <a:pPr indent="0" marL="0">
+            <a:pPr marL="0" indent="0">
               <a:spcAft>
                 <a:spcPts val="400"/>
               </a:spcAft>
@@ -2851,7 +2616,7 @@
             <a:endParaRPr lang="en-US" sz="1200" dirty="0"/>
           </a:p>
           <a:p>
-            <a:pPr indent="0" marL="0">
+            <a:pPr marL="0" indent="0">
               <a:spcAft>
                 <a:spcPts val="400"/>
               </a:spcAft>
@@ -2871,7 +2636,7 @@
             <a:endParaRPr lang="en-US" sz="1200" dirty="0"/>
           </a:p>
           <a:p>
-            <a:pPr indent="0" marL="0">
+            <a:pPr marL="0" indent="0">
               <a:spcAft>
                 <a:spcPts val="400"/>
               </a:spcAft>
@@ -2892,6 +2657,54 @@
           </a:p>
         </p:txBody>
       </p:sp>
+      <p:pic>
+        <p:nvPicPr>
+          <p:cNvPr id="13" name="Picture 12"/>
+          <p:cNvPicPr>
+            <a:picLocks noChangeAspect="1"/>
+          </p:cNvPicPr>
+          <p:nvPr/>
+        </p:nvPicPr>
+        <p:blipFill>
+          <a:blip r:embed="rId3"/>
+          <a:stretch>
+            <a:fillRect/>
+          </a:stretch>
+        </p:blipFill>
+        <p:spPr>
+          <a:xfrm>
+            <a:off x="238298" y="1353312"/>
+            <a:ext cx="2962102" cy="2505456"/>
+          </a:xfrm>
+          <a:prstGeom prst="rect">
+            <a:avLst/>
+          </a:prstGeom>
+        </p:spPr>
+      </p:pic>
+      <p:pic>
+        <p:nvPicPr>
+          <p:cNvPr id="14" name="Picture 13"/>
+          <p:cNvPicPr>
+            <a:picLocks noChangeAspect="1"/>
+          </p:cNvPicPr>
+          <p:nvPr/>
+        </p:nvPicPr>
+        <p:blipFill>
+          <a:blip r:embed="rId4"/>
+          <a:stretch>
+            <a:fillRect/>
+          </a:stretch>
+        </p:blipFill>
+        <p:spPr>
+          <a:xfrm>
+            <a:off x="3413925" y="1353312"/>
+            <a:ext cx="3515250" cy="2505456"/>
+          </a:xfrm>
+          <a:prstGeom prst="rect">
+            <a:avLst/>
+          </a:prstGeom>
+        </p:spPr>
+      </p:pic>
     </p:spTree>
   </p:cSld>
   <p:clrMapOvr>
@@ -2908,6 +2721,7 @@
         <a:solidFill>
           <a:srgbClr val="F5F3EF"/>
         </a:solidFill>
+        <a:effectLst/>
       </p:bgPr>
     </p:bg>
     <p:spTree>
@@ -2970,7 +2784,7 @@
           <a:bodyPr wrap="square" lIns="0" tIns="0" rIns="0" bIns="0" rtlCol="0" anchor="t"/>
           <a:lstStyle/>
           <a:p>
-            <a:pPr indent="0" marL="0">
+            <a:pPr marL="0" indent="0">
               <a:buNone/>
             </a:pPr>
             <a:r>
@@ -3009,7 +2823,7 @@
           <a:bodyPr wrap="square" lIns="0" tIns="0" rIns="0" bIns="0" rtlCol="0" anchor="t"/>
           <a:lstStyle/>
           <a:p>
-            <a:pPr algn="r" indent="0" marL="0">
+            <a:pPr marL="0" indent="0" algn="r">
               <a:buNone/>
             </a:pPr>
             <a:r>
@@ -3048,7 +2862,7 @@
           <a:bodyPr wrap="square" lIns="0" tIns="0" rIns="0" bIns="0" rtlCol="0" anchor="ctr"/>
           <a:lstStyle/>
           <a:p>
-            <a:pPr indent="0" marL="0">
+            <a:pPr marL="0" indent="0">
               <a:buNone/>
             </a:pPr>
             <a:r>
@@ -3087,7 +2901,7 @@
           <a:bodyPr wrap="square" lIns="0" tIns="0" rIns="0" bIns="0" rtlCol="0" anchor="t"/>
           <a:lstStyle/>
           <a:p>
-            <a:pPr indent="0" marL="0">
+            <a:pPr marL="0" indent="0">
               <a:buNone/>
             </a:pPr>
             <a:r>
@@ -3151,7 +2965,7 @@
           <a:bodyPr wrap="square" lIns="0" tIns="0" rIns="0" bIns="0" rtlCol="0" anchor="t"/>
           <a:lstStyle/>
           <a:p>
-            <a:pPr algn="ctr" indent="0" marL="0">
+            <a:pPr marL="0" indent="0" algn="ctr">
               <a:buNone/>
             </a:pPr>
             <a:r>
@@ -3190,7 +3004,7 @@
           <a:bodyPr wrap="square" lIns="0" tIns="0" rIns="0" bIns="0" rtlCol="0" anchor="t"/>
           <a:lstStyle/>
           <a:p>
-            <a:pPr algn="ctr" indent="0" marL="0">
+            <a:pPr marL="0" indent="0" algn="ctr">
               <a:buNone/>
             </a:pPr>
             <a:r>
@@ -3254,7 +3068,7 @@
           <a:bodyPr wrap="square" lIns="0" tIns="0" rIns="0" bIns="0" rtlCol="0" anchor="t"/>
           <a:lstStyle/>
           <a:p>
-            <a:pPr algn="ctr" indent="0" marL="0">
+            <a:pPr marL="0" indent="0" algn="ctr">
               <a:buNone/>
             </a:pPr>
             <a:r>
@@ -3293,7 +3107,7 @@
           <a:bodyPr wrap="square" lIns="0" tIns="0" rIns="0" bIns="0" rtlCol="0" anchor="t"/>
           <a:lstStyle/>
           <a:p>
-            <a:pPr algn="ctr" indent="0" marL="0">
+            <a:pPr marL="0" indent="0" algn="ctr">
               <a:buNone/>
             </a:pPr>
             <a:r>
@@ -3332,7 +3146,7 @@
           <a:bodyPr wrap="square" lIns="0" tIns="0" rIns="0" bIns="0" rtlCol="0" anchor="t"/>
           <a:lstStyle/>
           <a:p>
-            <a:pPr indent="0" marL="0">
+            <a:pPr marL="0" indent="0">
               <a:buNone/>
             </a:pPr>
             <a:r>
@@ -3371,7 +3185,7 @@
           <a:bodyPr wrap="square" lIns="0" tIns="0" rIns="0" bIns="0" rtlCol="0" anchor="t"/>
           <a:lstStyle/>
           <a:p>
-            <a:pPr indent="0" marL="0">
+            <a:pPr marL="0" indent="0">
               <a:buNone/>
             </a:pPr>
             <a:r>
@@ -3435,7 +3249,7 @@
           <a:bodyPr wrap="square" lIns="0" tIns="0" rIns="0" bIns="0" rtlCol="0" anchor="t"/>
           <a:lstStyle/>
           <a:p>
-            <a:pPr algn="ctr" indent="0" marL="0">
+            <a:pPr marL="0" indent="0" algn="ctr">
               <a:buNone/>
             </a:pPr>
             <a:r>
@@ -3474,7 +3288,7 @@
           <a:bodyPr wrap="square" lIns="0" tIns="0" rIns="0" bIns="0" rtlCol="0" anchor="t"/>
           <a:lstStyle/>
           <a:p>
-            <a:pPr algn="ctr" indent="0" marL="0">
+            <a:pPr marL="0" indent="0" algn="ctr">
               <a:buNone/>
             </a:pPr>
             <a:r>
@@ -3538,7 +3352,7 @@
           <a:bodyPr wrap="square" lIns="0" tIns="0" rIns="0" bIns="0" rtlCol="0" anchor="t"/>
           <a:lstStyle/>
           <a:p>
-            <a:pPr algn="ctr" indent="0" marL="0">
+            <a:pPr marL="0" indent="0" algn="ctr">
               <a:buNone/>
             </a:pPr>
             <a:r>
@@ -3577,7 +3391,7 @@
           <a:bodyPr wrap="square" lIns="0" tIns="0" rIns="0" bIns="0" rtlCol="0" anchor="t"/>
           <a:lstStyle/>
           <a:p>
-            <a:pPr algn="ctr" indent="0" marL="0">
+            <a:pPr marL="0" indent="0" algn="ctr">
               <a:buNone/>
             </a:pPr>
             <a:r>
@@ -3616,7 +3430,7 @@
           <a:bodyPr wrap="square" lIns="0" tIns="0" rIns="0" bIns="0" rtlCol="0" anchor="t"/>
           <a:lstStyle/>
           <a:p>
-            <a:pPr indent="0" marL="0">
+            <a:pPr marL="0" indent="0">
               <a:buNone/>
             </a:pPr>
             <a:r>
@@ -3740,7 +3554,7 @@
           <a:bodyPr wrap="square" lIns="0" tIns="0" rIns="0" bIns="0" rtlCol="0" anchor="t"/>
           <a:lstStyle/>
           <a:p>
-            <a:pPr indent="0" marL="0">
+            <a:pPr marL="0" indent="0">
               <a:buNone/>
             </a:pPr>
             <a:r>
@@ -3774,6 +3588,7 @@
         <a:solidFill>
           <a:srgbClr val="F5F3EF"/>
         </a:solidFill>
+        <a:effectLst/>
       </p:bgPr>
     </p:bg>
     <p:spTree>
@@ -3836,7 +3651,7 @@
           <a:bodyPr wrap="square" lIns="0" tIns="0" rIns="0" bIns="0" rtlCol="0" anchor="t"/>
           <a:lstStyle/>
           <a:p>
-            <a:pPr indent="0" marL="0">
+            <a:pPr marL="0" indent="0">
               <a:buNone/>
             </a:pPr>
             <a:r>
@@ -3875,7 +3690,7 @@
           <a:bodyPr wrap="square" lIns="0" tIns="0" rIns="0" bIns="0" rtlCol="0" anchor="t"/>
           <a:lstStyle/>
           <a:p>
-            <a:pPr algn="r" indent="0" marL="0">
+            <a:pPr marL="0" indent="0" algn="r">
               <a:buNone/>
             </a:pPr>
             <a:r>
@@ -3914,7 +3729,7 @@
           <a:bodyPr wrap="square" lIns="0" tIns="0" rIns="0" bIns="0" rtlCol="0" anchor="ctr"/>
           <a:lstStyle/>
           <a:p>
-            <a:pPr indent="0" marL="0">
+            <a:pPr marL="0" indent="0">
               <a:buNone/>
             </a:pPr>
             <a:r>
@@ -3932,36 +3747,6 @@
           </a:p>
         </p:txBody>
       </p:sp>
-      <p:pic>
-        <p:nvPicPr>
-          <p:cNvPr id="6" name="Image 0" descr="Python version of the literacy figure">    </p:cNvPr>
-          <p:cNvPicPr>
-            <a:picLocks noChangeAspect="1"/>
-          </p:cNvPicPr>
-          <p:nvPr/>
-        </p:nvPicPr>
-        <p:blipFill>
-          <a:blip r:embed="rId1">
-            <a:extLst>
-              <a:ext uri="{96DAC541-7B7A-43D3-8B79-37D633B846F1}">
-                <asvg:svgBlip xmlns:asvg="http://schemas.microsoft.com/office/drawing/2016/SVG/main" r:embed="rId2"/>
-              </a:ext>
-            </a:extLst>
-          </a:blip>
-          <a:stretch>
-            <a:fillRect/>
-          </a:stretch>
-        </p:blipFill>
-        <p:spPr>
-          <a:xfrm>
-            <a:off x="365760" y="1188720"/>
-            <a:ext cx="5120640" cy="3299968"/>
-          </a:xfrm>
-          <a:prstGeom prst="rect">
-            <a:avLst/>
-          </a:prstGeom>
-        </p:spPr>
-      </p:pic>
       <p:sp>
         <p:nvSpPr>
           <p:cNvPr id="7" name="Shape 4"/>
@@ -4008,7 +3793,7 @@
           <a:bodyPr wrap="square" lIns="0" tIns="0" rIns="0" bIns="0" rtlCol="0" anchor="t"/>
           <a:lstStyle/>
           <a:p>
-            <a:pPr algn="ctr" indent="0" marL="0">
+            <a:pPr marL="0" indent="0" algn="ctr">
               <a:buNone/>
             </a:pPr>
             <a:r>
@@ -4047,7 +3832,7 @@
           <a:bodyPr wrap="square" lIns="0" tIns="0" rIns="0" bIns="0" rtlCol="0" anchor="t"/>
           <a:lstStyle/>
           <a:p>
-            <a:pPr algn="ctr" indent="0" marL="0">
+            <a:pPr marL="0" indent="0" algn="ctr">
               <a:buNone/>
             </a:pPr>
             <a:r>
@@ -4111,7 +3896,7 @@
           <a:bodyPr wrap="square" lIns="0" tIns="0" rIns="0" bIns="0" rtlCol="0" anchor="t"/>
           <a:lstStyle/>
           <a:p>
-            <a:pPr algn="ctr" indent="0" marL="0">
+            <a:pPr marL="0" indent="0" algn="ctr">
               <a:buNone/>
             </a:pPr>
             <a:r>
@@ -4150,7 +3935,7 @@
           <a:bodyPr wrap="square" lIns="0" tIns="0" rIns="0" bIns="0" rtlCol="0" anchor="t"/>
           <a:lstStyle/>
           <a:p>
-            <a:pPr algn="ctr" indent="0" marL="0">
+            <a:pPr marL="0" indent="0" algn="ctr">
               <a:buNone/>
             </a:pPr>
             <a:r>
@@ -4189,7 +3974,7 @@
           <a:bodyPr wrap="square" lIns="0" tIns="0" rIns="0" bIns="0" rtlCol="0" anchor="t"/>
           <a:lstStyle/>
           <a:p>
-            <a:pPr indent="0" marL="0">
+            <a:pPr marL="0" indent="0">
               <a:buNone/>
             </a:pPr>
             <a:r>
@@ -4228,7 +4013,7 @@
           <a:bodyPr wrap="square" lIns="0" tIns="0" rIns="0" bIns="0" rtlCol="0" anchor="t"/>
           <a:lstStyle/>
           <a:p>
-            <a:pPr indent="0" marL="0">
+            <a:pPr marL="0" indent="0">
               <a:spcAft>
                 <a:spcPts val="400"/>
               </a:spcAft>
@@ -4248,7 +4033,7 @@
             <a:endParaRPr lang="en-US" sz="1200" dirty="0"/>
           </a:p>
           <a:p>
-            <a:pPr indent="0" marL="0">
+            <a:pPr marL="0" indent="0">
               <a:spcAft>
                 <a:spcPts val="400"/>
               </a:spcAft>
@@ -4269,6 +4054,30 @@
           </a:p>
         </p:txBody>
       </p:sp>
+      <p:pic>
+        <p:nvPicPr>
+          <p:cNvPr id="15" name="Picture 14"/>
+          <p:cNvPicPr>
+            <a:picLocks noChangeAspect="1"/>
+          </p:cNvPicPr>
+          <p:nvPr/>
+        </p:nvPicPr>
+        <p:blipFill>
+          <a:blip r:embed="rId3"/>
+          <a:stretch>
+            <a:fillRect/>
+          </a:stretch>
+        </p:blipFill>
+        <p:spPr>
+          <a:xfrm>
+            <a:off x="297871" y="1133856"/>
+            <a:ext cx="5105402" cy="3696116"/>
+          </a:xfrm>
+          <a:prstGeom prst="rect">
+            <a:avLst/>
+          </a:prstGeom>
+        </p:spPr>
+      </p:pic>
     </p:spTree>
   </p:cSld>
   <p:clrMapOvr>
@@ -4570,4 +4379,265 @@
     </a:ext>
   </a:extLst>
 </a:theme>
+</file>
+
+<file path=ppt/theme/theme2.xml><?xml version="1.0" encoding="utf-8"?>
+<a:theme xmlns:a="http://schemas.openxmlformats.org/drawingml/2006/main" name="Office Theme">
+  <a:themeElements>
+    <a:clrScheme name="Office">
+      <a:dk1>
+        <a:sysClr val="windowText" lastClr="000000"/>
+      </a:dk1>
+      <a:lt1>
+        <a:sysClr val="window" lastClr="FFFFFF"/>
+      </a:lt1>
+      <a:dk2>
+        <a:srgbClr val="44546A"/>
+      </a:dk2>
+      <a:lt2>
+        <a:srgbClr val="E7E6E6"/>
+      </a:lt2>
+      <a:accent1>
+        <a:srgbClr val="5B9BD5"/>
+      </a:accent1>
+      <a:accent2>
+        <a:srgbClr val="ED7D31"/>
+      </a:accent2>
+      <a:accent3>
+        <a:srgbClr val="A5A5A5"/>
+      </a:accent3>
+      <a:accent4>
+        <a:srgbClr val="FFC000"/>
+      </a:accent4>
+      <a:accent5>
+        <a:srgbClr val="4472C4"/>
+      </a:accent5>
+      <a:accent6>
+        <a:srgbClr val="70AD47"/>
+      </a:accent6>
+      <a:hlink>
+        <a:srgbClr val="0563C1"/>
+      </a:hlink>
+      <a:folHlink>
+        <a:srgbClr val="954F72"/>
+      </a:folHlink>
+    </a:clrScheme>
+    <a:fontScheme name="Office">
+      <a:majorFont>
+        <a:latin typeface="Calibri Light" panose="020F0302020204030204"/>
+        <a:ea typeface=""/>
+        <a:cs typeface=""/>
+        <a:font script="Jpan" typeface="游ゴシック Light"/>
+        <a:font script="Hang" typeface="맑은 고딕"/>
+        <a:font script="Hans" typeface="等线 Light"/>
+        <a:font script="Hant" typeface="新細明體"/>
+        <a:font script="Arab" typeface="Times New Roman"/>
+        <a:font script="Hebr" typeface="Times New Roman"/>
+        <a:font script="Thai" typeface="Angsana New"/>
+        <a:font script="Ethi" typeface="Nyala"/>
+        <a:font script="Beng" typeface="Vrinda"/>
+        <a:font script="Gujr" typeface="Shruti"/>
+        <a:font script="Khmr" typeface="MoolBoran"/>
+        <a:font script="Knda" typeface="Tunga"/>
+        <a:font script="Guru" typeface="Raavi"/>
+        <a:font script="Cans" typeface="Euphemia"/>
+        <a:font script="Cher" typeface="Plantagenet Cherokee"/>
+        <a:font script="Yiii" typeface="Microsoft Yi Baiti"/>
+        <a:font script="Tibt" typeface="Microsoft Himalaya"/>
+        <a:font script="Thaa" typeface="MV Boli"/>
+        <a:font script="Deva" typeface="Mangal"/>
+        <a:font script="Telu" typeface="Gautami"/>
+        <a:font script="Taml" typeface="Latha"/>
+        <a:font script="Syrc" typeface="Estrangelo Edessa"/>
+        <a:font script="Orya" typeface="Kalinga"/>
+        <a:font script="Mlym" typeface="Kartika"/>
+        <a:font script="Laoo" typeface="DokChampa"/>
+        <a:font script="Sinh" typeface="Iskoola Pota"/>
+        <a:font script="Mong" typeface="Mongolian Baiti"/>
+        <a:font script="Viet" typeface="Times New Roman"/>
+        <a:font script="Uigh" typeface="Microsoft Uighur"/>
+        <a:font script="Geor" typeface="Sylfaen"/>
+      </a:majorFont>
+      <a:minorFont>
+        <a:latin typeface="Calibri" panose="020F0502020204030204"/>
+        <a:ea typeface=""/>
+        <a:cs typeface=""/>
+        <a:font script="Jpan" typeface="游ゴシック"/>
+        <a:font script="Hang" typeface="맑은 고딕"/>
+        <a:font script="Hans" typeface="等线"/>
+        <a:font script="Hant" typeface="新細明體"/>
+        <a:font script="Arab" typeface="Arial"/>
+        <a:font script="Hebr" typeface="Arial"/>
+        <a:font script="Thai" typeface="Cordia New"/>
+        <a:font script="Ethi" typeface="Nyala"/>
+        <a:font script="Beng" typeface="Vrinda"/>
+        <a:font script="Gujr" typeface="Shruti"/>
+        <a:font script="Khmr" typeface="DaunPenh"/>
+        <a:font script="Knda" typeface="Tunga"/>
+        <a:font script="Guru" typeface="Raavi"/>
+        <a:font script="Cans" typeface="Euphemia"/>
+        <a:font script="Cher" typeface="Plantagenet Cherokee"/>
+        <a:font script="Yiii" typeface="Microsoft Yi Baiti"/>
+        <a:font script="Tibt" typeface="Microsoft Himalaya"/>
+        <a:font script="Thaa" typeface="MV Boli"/>
+        <a:font script="Deva" typeface="Mangal"/>
+        <a:font script="Telu" typeface="Gautami"/>
+        <a:font script="Taml" typeface="Latha"/>
+        <a:font script="Syrc" typeface="Estrangelo Edessa"/>
+        <a:font script="Orya" typeface="Kalinga"/>
+        <a:font script="Mlym" typeface="Kartika"/>
+        <a:font script="Laoo" typeface="DokChampa"/>
+        <a:font script="Sinh" typeface="Iskoola Pota"/>
+        <a:font script="Mong" typeface="Mongolian Baiti"/>
+        <a:font script="Viet" typeface="Arial"/>
+        <a:font script="Uigh" typeface="Microsoft Uighur"/>
+        <a:font script="Geor" typeface="Sylfaen"/>
+      </a:minorFont>
+    </a:fontScheme>
+    <a:fmtScheme name="Office">
+      <a:fillStyleLst>
+        <a:solidFill>
+          <a:schemeClr val="phClr"/>
+        </a:solidFill>
+        <a:gradFill rotWithShape="1">
+          <a:gsLst>
+            <a:gs pos="0">
+              <a:schemeClr val="phClr">
+                <a:lumMod val="110000"/>
+                <a:satMod val="105000"/>
+                <a:tint val="67000"/>
+              </a:schemeClr>
+            </a:gs>
+            <a:gs pos="50000">
+              <a:schemeClr val="phClr">
+                <a:lumMod val="105000"/>
+                <a:satMod val="103000"/>
+                <a:tint val="73000"/>
+              </a:schemeClr>
+            </a:gs>
+            <a:gs pos="100000">
+              <a:schemeClr val="phClr">
+                <a:lumMod val="105000"/>
+                <a:satMod val="109000"/>
+                <a:tint val="81000"/>
+              </a:schemeClr>
+            </a:gs>
+          </a:gsLst>
+          <a:lin ang="5400000" scaled="0"/>
+        </a:gradFill>
+        <a:gradFill rotWithShape="1">
+          <a:gsLst>
+            <a:gs pos="0">
+              <a:schemeClr val="phClr">
+                <a:satMod val="103000"/>
+                <a:lumMod val="102000"/>
+                <a:tint val="94000"/>
+              </a:schemeClr>
+            </a:gs>
+            <a:gs pos="50000">
+              <a:schemeClr val="phClr">
+                <a:satMod val="110000"/>
+                <a:lumMod val="100000"/>
+                <a:shade val="100000"/>
+              </a:schemeClr>
+            </a:gs>
+            <a:gs pos="100000">
+              <a:schemeClr val="phClr">
+                <a:lumMod val="99000"/>
+                <a:satMod val="120000"/>
+                <a:shade val="78000"/>
+              </a:schemeClr>
+            </a:gs>
+          </a:gsLst>
+          <a:lin ang="5400000" scaled="0"/>
+        </a:gradFill>
+      </a:fillStyleLst>
+      <a:lnStyleLst>
+        <a:ln w="6350" cap="flat" cmpd="sng" algn="ctr">
+          <a:solidFill>
+            <a:schemeClr val="phClr"/>
+          </a:solidFill>
+          <a:prstDash val="solid"/>
+          <a:miter lim="800000"/>
+        </a:ln>
+        <a:ln w="12700" cap="flat" cmpd="sng" algn="ctr">
+          <a:solidFill>
+            <a:schemeClr val="phClr"/>
+          </a:solidFill>
+          <a:prstDash val="solid"/>
+          <a:miter lim="800000"/>
+        </a:ln>
+        <a:ln w="19050" cap="flat" cmpd="sng" algn="ctr">
+          <a:solidFill>
+            <a:schemeClr val="phClr"/>
+          </a:solidFill>
+          <a:prstDash val="solid"/>
+          <a:miter lim="800000"/>
+        </a:ln>
+      </a:lnStyleLst>
+      <a:effectStyleLst>
+        <a:effectStyle>
+          <a:effectLst/>
+        </a:effectStyle>
+        <a:effectStyle>
+          <a:effectLst/>
+        </a:effectStyle>
+        <a:effectStyle>
+          <a:effectLst>
+            <a:outerShdw blurRad="57150" dist="19050" dir="5400000" algn="ctr" rotWithShape="0">
+              <a:srgbClr val="000000">
+                <a:alpha val="63000"/>
+              </a:srgbClr>
+            </a:outerShdw>
+          </a:effectLst>
+        </a:effectStyle>
+      </a:effectStyleLst>
+      <a:bgFillStyleLst>
+        <a:solidFill>
+          <a:schemeClr val="phClr"/>
+        </a:solidFill>
+        <a:solidFill>
+          <a:schemeClr val="phClr">
+            <a:tint val="95000"/>
+            <a:satMod val="170000"/>
+          </a:schemeClr>
+        </a:solidFill>
+        <a:gradFill rotWithShape="1">
+          <a:gsLst>
+            <a:gs pos="0">
+              <a:schemeClr val="phClr">
+                <a:tint val="93000"/>
+                <a:satMod val="150000"/>
+                <a:shade val="98000"/>
+                <a:lumMod val="102000"/>
+              </a:schemeClr>
+            </a:gs>
+            <a:gs pos="50000">
+              <a:schemeClr val="phClr">
+                <a:tint val="98000"/>
+                <a:satMod val="130000"/>
+                <a:shade val="90000"/>
+                <a:lumMod val="103000"/>
+              </a:schemeClr>
+            </a:gs>
+            <a:gs pos="100000">
+              <a:schemeClr val="phClr">
+                <a:shade val="63000"/>
+                <a:satMod val="120000"/>
+              </a:schemeClr>
+            </a:gs>
+          </a:gsLst>
+          <a:lin ang="5400000" scaled="0"/>
+        </a:gradFill>
+      </a:bgFillStyleLst>
+    </a:fmtScheme>
+  </a:themeElements>
+  <a:objectDefaults/>
+  <a:extraClrSchemeLst/>
+  <a:extLst>
+    <a:ext uri="{05A4C25C-085E-4340-85A3-A5531E510DB2}">
+      <thm15:themeFamily xmlns:thm15="http://schemas.microsoft.com/office/thememl/2012/main" name="Office Theme" id="{62F939B6-93AF-4DB8-9C6B-D6C7DFDC589F}" vid="{4A3C46E8-61CC-4603-A589-7422A47A8E4A}"/>
+    </a:ext>
+  </a:extLst>
+</a:theme>
 </file>